--- a/Week_2/Slides/Week 2.pptx
+++ b/Week_2/Slides/Week 2.pptx
@@ -9100,19 +9100,7 @@
                 <a:cs typeface="Inter"/>
                 <a:sym typeface="Inter"/>
               </a:rPr>
-              <a:t>Sept </a:t>
-            </a:r>
-            <a:r>
-              <a:rPr b="0" i="0" lang="en" sz="1100" u="none" cap="none" strike="noStrike">
-                <a:solidFill>
-                  <a:srgbClr val="1D1B24"/>
-                </a:solidFill>
-                <a:latin typeface="Inter"/>
-                <a:ea typeface="Inter"/>
-                <a:cs typeface="Inter"/>
-                <a:sym typeface="Inter"/>
-              </a:rPr>
-              <a:t>29</a:t>
+              <a:t>Oct 6</a:t>
             </a:r>
             <a:endParaRPr b="0" i="0" sz="1100" u="none" cap="none" strike="noStrike">
               <a:solidFill>
@@ -9190,19 +9178,7 @@
                 <a:cs typeface="Inter"/>
                 <a:sym typeface="Inter"/>
               </a:rPr>
-              <a:t>Oct </a:t>
-            </a:r>
-            <a:r>
-              <a:rPr b="0" i="0" lang="en" sz="1100" u="none" cap="none" strike="noStrike">
-                <a:solidFill>
-                  <a:srgbClr val="1D1B24"/>
-                </a:solidFill>
-                <a:latin typeface="Inter"/>
-                <a:ea typeface="Inter"/>
-                <a:cs typeface="Inter"/>
-                <a:sym typeface="Inter"/>
-              </a:rPr>
-              <a:t>1</a:t>
+              <a:t>Oct 8</a:t>
             </a:r>
             <a:endParaRPr b="0" i="0" sz="1100" u="none" cap="none" strike="noStrike">
               <a:solidFill>
@@ -24718,9 +24694,9 @@
 </file>
 
 <file path=ppt/theme/theme1.xml><?xml version="1.0" encoding="utf-8"?>
-<a:theme xmlns:a="http://schemas.openxmlformats.org/drawingml/2006/main" xmlns:r="http://schemas.openxmlformats.org/officeDocument/2006/relationships">
+<a:theme xmlns:a="http://schemas.openxmlformats.org/drawingml/2006/main" xmlns:r="http://schemas.openxmlformats.org/officeDocument/2006/relationships" name="Office Theme">
   <a:themeElements>
-    <a:clrScheme name="Default">
+    <a:clrScheme name="Office">
       <a:dk1>
         <a:srgbClr val="000000"/>
       </a:dk1>
@@ -24728,34 +24704,34 @@
         <a:srgbClr val="FFFFFF"/>
       </a:lt1>
       <a:dk2>
-        <a:srgbClr val="158158"/>
+        <a:srgbClr val="44546A"/>
       </a:dk2>
       <a:lt2>
-        <a:srgbClr val="F3F3F3"/>
+        <a:srgbClr val="E7E6E6"/>
       </a:lt2>
       <a:accent1>
-        <a:srgbClr val="058DC7"/>
+        <a:srgbClr val="4472C4"/>
       </a:accent1>
       <a:accent2>
-        <a:srgbClr val="50B432"/>
+        <a:srgbClr val="ED7D31"/>
       </a:accent2>
       <a:accent3>
-        <a:srgbClr val="ED561B"/>
+        <a:srgbClr val="A5A5A5"/>
       </a:accent3>
       <a:accent4>
-        <a:srgbClr val="EDEF00"/>
+        <a:srgbClr val="FFC000"/>
       </a:accent4>
       <a:accent5>
-        <a:srgbClr val="24CBE5"/>
+        <a:srgbClr val="5B9BD5"/>
       </a:accent5>
       <a:accent6>
-        <a:srgbClr val="64E572"/>
+        <a:srgbClr val="70AD47"/>
       </a:accent6>
       <a:hlink>
-        <a:srgbClr val="2200CC"/>
+        <a:srgbClr val="0563C1"/>
       </a:hlink>
       <a:folHlink>
-        <a:srgbClr val="551A8B"/>
+        <a:srgbClr val="954F72"/>
       </a:folHlink>
     </a:clrScheme>
     <a:fontScheme name="Office">
@@ -24997,9 +24973,9 @@
 </file>
 
 <file path=ppt/theme/theme2.xml><?xml version="1.0" encoding="utf-8"?>
-<a:theme xmlns:a="http://schemas.openxmlformats.org/drawingml/2006/main" xmlns:r="http://schemas.openxmlformats.org/officeDocument/2006/relationships" name="Office Theme">
+<a:theme xmlns:a="http://schemas.openxmlformats.org/drawingml/2006/main" xmlns:r="http://schemas.openxmlformats.org/officeDocument/2006/relationships" name="Simple Light">
   <a:themeElements>
-    <a:clrScheme name="Office">
+    <a:clrScheme name="Simple Light">
       <a:dk1>
         <a:srgbClr val="000000"/>
       </a:dk1>
@@ -25007,34 +24983,34 @@
         <a:srgbClr val="FFFFFF"/>
       </a:lt1>
       <a:dk2>
-        <a:srgbClr val="44546A"/>
+        <a:srgbClr val="595959"/>
       </a:dk2>
       <a:lt2>
-        <a:srgbClr val="E7E6E6"/>
+        <a:srgbClr val="EEEEEE"/>
       </a:lt2>
       <a:accent1>
-        <a:srgbClr val="4472C4"/>
+        <a:srgbClr val="4285F4"/>
       </a:accent1>
       <a:accent2>
-        <a:srgbClr val="ED7D31"/>
+        <a:srgbClr val="212121"/>
       </a:accent2>
       <a:accent3>
-        <a:srgbClr val="A5A5A5"/>
+        <a:srgbClr val="78909C"/>
       </a:accent3>
       <a:accent4>
-        <a:srgbClr val="FFC000"/>
+        <a:srgbClr val="FFAB40"/>
       </a:accent4>
       <a:accent5>
-        <a:srgbClr val="5B9BD5"/>
+        <a:srgbClr val="0097A7"/>
       </a:accent5>
       <a:accent6>
-        <a:srgbClr val="70AD47"/>
+        <a:srgbClr val="EEFF41"/>
       </a:accent6>
       <a:hlink>
-        <a:srgbClr val="0563C1"/>
+        <a:srgbClr val="0097A7"/>
       </a:hlink>
       <a:folHlink>
-        <a:srgbClr val="954F72"/>
+        <a:srgbClr val="0097A7"/>
       </a:folHlink>
     </a:clrScheme>
     <a:fontScheme name="Office">
@@ -25555,9 +25531,9 @@
 </file>
 
 <file path=ppt/theme/theme4.xml><?xml version="1.0" encoding="utf-8"?>
-<a:theme xmlns:a="http://schemas.openxmlformats.org/drawingml/2006/main" xmlns:r="http://schemas.openxmlformats.org/officeDocument/2006/relationships" name="Simple Light">
+<a:theme xmlns:a="http://schemas.openxmlformats.org/drawingml/2006/main" xmlns:r="http://schemas.openxmlformats.org/officeDocument/2006/relationships">
   <a:themeElements>
-    <a:clrScheme name="Simple Light">
+    <a:clrScheme name="Default">
       <a:dk1>
         <a:srgbClr val="000000"/>
       </a:dk1>
@@ -25565,34 +25541,34 @@
         <a:srgbClr val="FFFFFF"/>
       </a:lt1>
       <a:dk2>
-        <a:srgbClr val="595959"/>
+        <a:srgbClr val="158158"/>
       </a:dk2>
       <a:lt2>
-        <a:srgbClr val="EEEEEE"/>
+        <a:srgbClr val="F3F3F3"/>
       </a:lt2>
       <a:accent1>
-        <a:srgbClr val="4285F4"/>
+        <a:srgbClr val="058DC7"/>
       </a:accent1>
       <a:accent2>
-        <a:srgbClr val="212121"/>
+        <a:srgbClr val="50B432"/>
       </a:accent2>
       <a:accent3>
-        <a:srgbClr val="78909C"/>
+        <a:srgbClr val="ED561B"/>
       </a:accent3>
       <a:accent4>
-        <a:srgbClr val="FFAB40"/>
+        <a:srgbClr val="EDEF00"/>
       </a:accent4>
       <a:accent5>
-        <a:srgbClr val="0097A7"/>
+        <a:srgbClr val="24CBE5"/>
       </a:accent5>
       <a:accent6>
-        <a:srgbClr val="EEFF41"/>
+        <a:srgbClr val="64E572"/>
       </a:accent6>
       <a:hlink>
-        <a:srgbClr val="0097A7"/>
+        <a:srgbClr val="2200CC"/>
       </a:hlink>
       <a:folHlink>
-        <a:srgbClr val="0097A7"/>
+        <a:srgbClr val="551A8B"/>
       </a:folHlink>
     </a:clrScheme>
     <a:fontScheme name="Office">
